--- a/rapports/septembre/Mabex_sept2026.pptx
+++ b/rapports/septembre/Mabex_sept2026.pptx
@@ -6124,7 +6124,7 @@
         <p:spPr>
           <a:xfrm>
             <a:off x="8296656" y="4389120"/>
-            <a:ext cx="2072640" cy="152400"/>
+            <a:ext cx="2225040" cy="152400"/>
           </a:xfrm>
           <a:prstGeom prst="rect">
             <a:avLst/>
@@ -6139,13 +6139,13 @@
           <a:p>
             <a:pPr algn="l"/>
             <a:r>
-              <a:rPr sz="1000" b="0" i="0">
+              <a:rPr sz="800" b="0" i="0">
                 <a:solidFill>
                   <a:srgbClr val="111111"/>
                 </a:solidFill>
                 <a:latin typeface="Arial"/>
               </a:rPr>
-              <a:t>À compléter</a:t>
+              <a:t>Électricité, interrupteurs et prises</a:t>
             </a:r>
           </a:p>
         </p:txBody>
@@ -6158,8 +6158,324 @@
         </p:nvSpPr>
         <p:spPr>
           <a:xfrm>
+            <a:off x="8077200" y="4675632"/>
+            <a:ext cx="121920" cy="121920"/>
+          </a:xfrm>
+          <a:prstGeom prst="rect">
+            <a:avLst/>
+          </a:prstGeom>
+          <a:solidFill>
+            <a:srgbClr val="7A4E96"/>
+          </a:solidFill>
+          <a:ln>
+            <a:noFill/>
+          </a:ln>
+          <a:effectLst/>
+        </p:spPr>
+        <p:style>
+          <a:lnRef idx="1">
+            <a:schemeClr val="accent1"/>
+          </a:lnRef>
+          <a:fillRef idx="3">
+            <a:schemeClr val="accent1"/>
+          </a:fillRef>
+          <a:effectRef idx="2">
+            <a:schemeClr val="accent1"/>
+          </a:effectRef>
+          <a:fontRef idx="minor">
+            <a:schemeClr val="lt1"/>
+          </a:fontRef>
+        </p:style>
+        <p:txBody>
+          <a:bodyPr rtlCol="0" anchor="ctr"/>
+          <a:lstStyle/>
+          <a:p>
+            <a:pPr algn="ctr"/>
+          </a:p>
+        </p:txBody>
+      </p:sp>
+      <p:sp>
+        <p:nvSpPr>
+          <p:cNvPr id="83" name="TextBox 82"/>
+          <p:cNvSpPr txBox="1"/>
+          <p:nvPr/>
+        </p:nvSpPr>
+        <p:spPr>
+          <a:xfrm>
+            <a:off x="8296656" y="4657344"/>
+            <a:ext cx="2225040" cy="152400"/>
+          </a:xfrm>
+          <a:prstGeom prst="rect">
+            <a:avLst/>
+          </a:prstGeom>
+          <a:noFill/>
+        </p:spPr>
+        <p:txBody>
+          <a:bodyPr wrap="square" anchor="t" lIns="0" rIns="0" tIns="0" bIns="0">
+            <a:spAutoFit/>
+          </a:bodyPr>
+          <a:lstStyle/>
+          <a:p>
+            <a:pPr algn="l"/>
+            <a:r>
+              <a:rPr sz="1000" b="0" i="0">
+                <a:solidFill>
+                  <a:srgbClr val="111111"/>
+                </a:solidFill>
+                <a:latin typeface="Arial"/>
+              </a:rPr>
+              <a:t>Chauffe-eau et eau chaude · 20 %</a:t>
+            </a:r>
+          </a:p>
+        </p:txBody>
+      </p:sp>
+      <p:sp>
+        <p:nvSpPr>
+          <p:cNvPr id="84" name="Rectangle 83"/>
+          <p:cNvSpPr/>
+          <p:nvPr/>
+        </p:nvSpPr>
+        <p:spPr>
+          <a:xfrm>
+            <a:off x="8077200" y="4943856"/>
+            <a:ext cx="121920" cy="121920"/>
+          </a:xfrm>
+          <a:prstGeom prst="rect">
+            <a:avLst/>
+          </a:prstGeom>
+          <a:solidFill>
+            <a:srgbClr val="EB9A5E"/>
+          </a:solidFill>
+          <a:ln>
+            <a:noFill/>
+          </a:ln>
+          <a:effectLst/>
+        </p:spPr>
+        <p:style>
+          <a:lnRef idx="1">
+            <a:schemeClr val="accent1"/>
+          </a:lnRef>
+          <a:fillRef idx="3">
+            <a:schemeClr val="accent1"/>
+          </a:fillRef>
+          <a:effectRef idx="2">
+            <a:schemeClr val="accent1"/>
+          </a:effectRef>
+          <a:fontRef idx="minor">
+            <a:schemeClr val="lt1"/>
+          </a:fontRef>
+        </p:style>
+        <p:txBody>
+          <a:bodyPr rtlCol="0" anchor="ctr"/>
+          <a:lstStyle/>
+          <a:p>
+            <a:pPr algn="ctr"/>
+          </a:p>
+        </p:txBody>
+      </p:sp>
+      <p:sp>
+        <p:nvSpPr>
+          <p:cNvPr id="85" name="TextBox 84"/>
+          <p:cNvSpPr txBox="1"/>
+          <p:nvPr/>
+        </p:nvSpPr>
+        <p:spPr>
+          <a:xfrm>
+            <a:off x="8296656" y="4925568"/>
+            <a:ext cx="2225040" cy="152400"/>
+          </a:xfrm>
+          <a:prstGeom prst="rect">
+            <a:avLst/>
+          </a:prstGeom>
+          <a:noFill/>
+        </p:spPr>
+        <p:txBody>
+          <a:bodyPr wrap="square" anchor="t" lIns="0" rIns="0" tIns="0" bIns="0">
+            <a:spAutoFit/>
+          </a:bodyPr>
+          <a:lstStyle/>
+          <a:p>
+            <a:pPr algn="l"/>
+            <a:r>
+              <a:rPr sz="1000" b="0" i="0">
+                <a:solidFill>
+                  <a:srgbClr val="111111"/>
+                </a:solidFill>
+                <a:latin typeface="Arial"/>
+              </a:rPr>
+              <a:t>Chauffage et radiateurs · 16 %</a:t>
+            </a:r>
+          </a:p>
+        </p:txBody>
+      </p:sp>
+      <p:sp>
+        <p:nvSpPr>
+          <p:cNvPr id="86" name="Rectangle 85"/>
+          <p:cNvSpPr/>
+          <p:nvPr/>
+        </p:nvSpPr>
+        <p:spPr>
+          <a:xfrm>
+            <a:off x="8077200" y="5212080"/>
+            <a:ext cx="121920" cy="121920"/>
+          </a:xfrm>
+          <a:prstGeom prst="rect">
+            <a:avLst/>
+          </a:prstGeom>
+          <a:solidFill>
+            <a:srgbClr val="EE6A2C"/>
+          </a:solidFill>
+          <a:ln>
+            <a:noFill/>
+          </a:ln>
+          <a:effectLst/>
+        </p:spPr>
+        <p:style>
+          <a:lnRef idx="1">
+            <a:schemeClr val="accent1"/>
+          </a:lnRef>
+          <a:fillRef idx="3">
+            <a:schemeClr val="accent1"/>
+          </a:fillRef>
+          <a:effectRef idx="2">
+            <a:schemeClr val="accent1"/>
+          </a:effectRef>
+          <a:fontRef idx="minor">
+            <a:schemeClr val="lt1"/>
+          </a:fontRef>
+        </p:style>
+        <p:txBody>
+          <a:bodyPr rtlCol="0" anchor="ctr"/>
+          <a:lstStyle/>
+          <a:p>
+            <a:pPr algn="ctr"/>
+          </a:p>
+        </p:txBody>
+      </p:sp>
+      <p:sp>
+        <p:nvSpPr>
+          <p:cNvPr id="87" name="TextBox 86"/>
+          <p:cNvSpPr txBox="1"/>
+          <p:nvPr/>
+        </p:nvSpPr>
+        <p:spPr>
+          <a:xfrm>
+            <a:off x="8296656" y="5193792"/>
+            <a:ext cx="2225040" cy="152400"/>
+          </a:xfrm>
+          <a:prstGeom prst="rect">
+            <a:avLst/>
+          </a:prstGeom>
+          <a:noFill/>
+        </p:spPr>
+        <p:txBody>
+          <a:bodyPr wrap="square" anchor="t" lIns="0" rIns="0" tIns="0" bIns="0">
+            <a:spAutoFit/>
+          </a:bodyPr>
+          <a:lstStyle/>
+          <a:p>
+            <a:pPr algn="l"/>
+            <a:r>
+              <a:rPr sz="800" b="0" i="0">
+                <a:solidFill>
+                  <a:srgbClr val="111111"/>
+                </a:solidFill>
+                <a:latin typeface="Arial"/>
+              </a:rPr>
+              <a:t>EPI et vêtements de sécurité · 3 %</a:t>
+            </a:r>
+          </a:p>
+        </p:txBody>
+      </p:sp>
+      <p:sp>
+        <p:nvSpPr>
+          <p:cNvPr id="88" name="Rectangle 87"/>
+          <p:cNvSpPr/>
+          <p:nvPr/>
+        </p:nvSpPr>
+        <p:spPr>
+          <a:xfrm>
+            <a:off x="8077200" y="5480304"/>
+            <a:ext cx="121920" cy="121920"/>
+          </a:xfrm>
+          <a:prstGeom prst="rect">
+            <a:avLst/>
+          </a:prstGeom>
+          <a:solidFill>
+            <a:srgbClr val="3E5A78"/>
+          </a:solidFill>
+          <a:ln>
+            <a:noFill/>
+          </a:ln>
+          <a:effectLst/>
+        </p:spPr>
+        <p:style>
+          <a:lnRef idx="1">
+            <a:schemeClr val="accent1"/>
+          </a:lnRef>
+          <a:fillRef idx="3">
+            <a:schemeClr val="accent1"/>
+          </a:fillRef>
+          <a:effectRef idx="2">
+            <a:schemeClr val="accent1"/>
+          </a:effectRef>
+          <a:fontRef idx="minor">
+            <a:schemeClr val="lt1"/>
+          </a:fontRef>
+        </p:style>
+        <p:txBody>
+          <a:bodyPr rtlCol="0" anchor="ctr"/>
+          <a:lstStyle/>
+          <a:p>
+            <a:pPr algn="ctr"/>
+          </a:p>
+        </p:txBody>
+      </p:sp>
+      <p:sp>
+        <p:nvSpPr>
+          <p:cNvPr id="89" name="TextBox 88"/>
+          <p:cNvSpPr txBox="1"/>
+          <p:nvPr/>
+        </p:nvSpPr>
+        <p:spPr>
+          <a:xfrm>
+            <a:off x="8296656" y="5462016"/>
+            <a:ext cx="2225040" cy="152400"/>
+          </a:xfrm>
+          <a:prstGeom prst="rect">
+            <a:avLst/>
+          </a:prstGeom>
+          <a:noFill/>
+        </p:spPr>
+        <p:txBody>
+          <a:bodyPr wrap="square" anchor="t" lIns="0" rIns="0" tIns="0" bIns="0">
+            <a:spAutoFit/>
+          </a:bodyPr>
+          <a:lstStyle/>
+          <a:p>
+            <a:pPr algn="l"/>
+            <a:r>
+              <a:rPr sz="1000" b="0" i="0">
+                <a:solidFill>
+                  <a:srgbClr val="111111"/>
+                </a:solidFill>
+                <a:latin typeface="Arial"/>
+              </a:rPr>
+              <a:t>Outillage et plomberie · &lt; 1 %</a:t>
+            </a:r>
+          </a:p>
+        </p:txBody>
+      </p:sp>
+      <p:sp>
+        <p:nvSpPr>
+          <p:cNvPr id="90" name="Rectangle 89"/>
+          <p:cNvSpPr/>
+          <p:nvPr/>
+        </p:nvSpPr>
+        <p:spPr>
+          <a:xfrm>
             <a:off x="10564368" y="4450080"/>
-            <a:ext cx="475488" cy="1341120"/>
+            <a:ext cx="475488" cy="818083"/>
           </a:xfrm>
           <a:prstGeom prst="rect">
             <a:avLst/>
@@ -6196,14 +6512,14 @@
       </p:sp>
       <p:sp>
         <p:nvSpPr>
-          <p:cNvPr id="83" name="TextBox 82"/>
+          <p:cNvPr id="91" name="TextBox 90"/>
           <p:cNvSpPr txBox="1"/>
           <p:nvPr/>
         </p:nvSpPr>
         <p:spPr>
           <a:xfrm>
             <a:off x="10564368" y="4450080"/>
-            <a:ext cx="475488" cy="1341120"/>
+            <a:ext cx="475488" cy="818083"/>
           </a:xfrm>
           <a:prstGeom prst="rect">
             <a:avLst/>
@@ -6224,8 +6540,184 @@
                 </a:solidFill>
                 <a:latin typeface="Arial"/>
               </a:rPr>
-              <a:t>100 %</a:t>
-            </a:r>
+              <a:t>61 %</a:t>
+            </a:r>
+          </a:p>
+        </p:txBody>
+      </p:sp>
+      <p:sp>
+        <p:nvSpPr>
+          <p:cNvPr id="92" name="Rectangle 91"/>
+          <p:cNvSpPr/>
+          <p:nvPr/>
+        </p:nvSpPr>
+        <p:spPr>
+          <a:xfrm>
+            <a:off x="10564368" y="5268163"/>
+            <a:ext cx="475488" cy="268224"/>
+          </a:xfrm>
+          <a:prstGeom prst="rect">
+            <a:avLst/>
+          </a:prstGeom>
+          <a:solidFill>
+            <a:srgbClr val="7A4E96"/>
+          </a:solidFill>
+          <a:ln>
+            <a:noFill/>
+          </a:ln>
+          <a:effectLst/>
+        </p:spPr>
+        <p:style>
+          <a:lnRef idx="1">
+            <a:schemeClr val="accent1"/>
+          </a:lnRef>
+          <a:fillRef idx="3">
+            <a:schemeClr val="accent1"/>
+          </a:fillRef>
+          <a:effectRef idx="2">
+            <a:schemeClr val="accent1"/>
+          </a:effectRef>
+          <a:fontRef idx="minor">
+            <a:schemeClr val="lt1"/>
+          </a:fontRef>
+        </p:style>
+        <p:txBody>
+          <a:bodyPr rtlCol="0" anchor="ctr"/>
+          <a:lstStyle/>
+          <a:p>
+            <a:pPr algn="ctr"/>
+          </a:p>
+        </p:txBody>
+      </p:sp>
+      <p:sp>
+        <p:nvSpPr>
+          <p:cNvPr id="93" name="Rectangle 92"/>
+          <p:cNvSpPr/>
+          <p:nvPr/>
+        </p:nvSpPr>
+        <p:spPr>
+          <a:xfrm>
+            <a:off x="10564368" y="5536387"/>
+            <a:ext cx="475488" cy="214579"/>
+          </a:xfrm>
+          <a:prstGeom prst="rect">
+            <a:avLst/>
+          </a:prstGeom>
+          <a:solidFill>
+            <a:srgbClr val="EB9A5E"/>
+          </a:solidFill>
+          <a:ln>
+            <a:noFill/>
+          </a:ln>
+          <a:effectLst/>
+        </p:spPr>
+        <p:style>
+          <a:lnRef idx="1">
+            <a:schemeClr val="accent1"/>
+          </a:lnRef>
+          <a:fillRef idx="3">
+            <a:schemeClr val="accent1"/>
+          </a:fillRef>
+          <a:effectRef idx="2">
+            <a:schemeClr val="accent1"/>
+          </a:effectRef>
+          <a:fontRef idx="minor">
+            <a:schemeClr val="lt1"/>
+          </a:fontRef>
+        </p:style>
+        <p:txBody>
+          <a:bodyPr rtlCol="0" anchor="ctr"/>
+          <a:lstStyle/>
+          <a:p>
+            <a:pPr algn="ctr"/>
+          </a:p>
+        </p:txBody>
+      </p:sp>
+      <p:sp>
+        <p:nvSpPr>
+          <p:cNvPr id="94" name="Rectangle 93"/>
+          <p:cNvSpPr/>
+          <p:nvPr/>
+        </p:nvSpPr>
+        <p:spPr>
+          <a:xfrm>
+            <a:off x="10564368" y="5750966"/>
+            <a:ext cx="475488" cy="40233"/>
+          </a:xfrm>
+          <a:prstGeom prst="rect">
+            <a:avLst/>
+          </a:prstGeom>
+          <a:solidFill>
+            <a:srgbClr val="EE6A2C"/>
+          </a:solidFill>
+          <a:ln>
+            <a:noFill/>
+          </a:ln>
+          <a:effectLst/>
+        </p:spPr>
+        <p:style>
+          <a:lnRef idx="1">
+            <a:schemeClr val="accent1"/>
+          </a:lnRef>
+          <a:fillRef idx="3">
+            <a:schemeClr val="accent1"/>
+          </a:fillRef>
+          <a:effectRef idx="2">
+            <a:schemeClr val="accent1"/>
+          </a:effectRef>
+          <a:fontRef idx="minor">
+            <a:schemeClr val="lt1"/>
+          </a:fontRef>
+        </p:style>
+        <p:txBody>
+          <a:bodyPr rtlCol="0" anchor="ctr"/>
+          <a:lstStyle/>
+          <a:p>
+            <a:pPr algn="ctr"/>
+          </a:p>
+        </p:txBody>
+      </p:sp>
+      <p:sp>
+        <p:nvSpPr>
+          <p:cNvPr id="95" name="Rectangle 94"/>
+          <p:cNvSpPr/>
+          <p:nvPr/>
+        </p:nvSpPr>
+        <p:spPr>
+          <a:xfrm>
+            <a:off x="10564368" y="5791200"/>
+            <a:ext cx="475488" cy="0"/>
+          </a:xfrm>
+          <a:prstGeom prst="rect">
+            <a:avLst/>
+          </a:prstGeom>
+          <a:solidFill>
+            <a:srgbClr val="3E5A78"/>
+          </a:solidFill>
+          <a:ln>
+            <a:noFill/>
+          </a:ln>
+          <a:effectLst/>
+        </p:spPr>
+        <p:style>
+          <a:lnRef idx="1">
+            <a:schemeClr val="accent1"/>
+          </a:lnRef>
+          <a:fillRef idx="3">
+            <a:schemeClr val="accent1"/>
+          </a:fillRef>
+          <a:effectRef idx="2">
+            <a:schemeClr val="accent1"/>
+          </a:effectRef>
+          <a:fontRef idx="minor">
+            <a:schemeClr val="lt1"/>
+          </a:fontRef>
+        </p:style>
+        <p:txBody>
+          <a:bodyPr rtlCol="0" anchor="ctr"/>
+          <a:lstStyle/>
+          <a:p>
+            <a:pPr algn="ctr"/>
           </a:p>
         </p:txBody>
       </p:sp>

--- a/rapports/septembre/Mabex_sept2026.pptx
+++ b/rapports/septembre/Mabex_sept2026.pptx
@@ -5283,13 +5283,22 @@
               </a:spcAft>
             </a:pPr>
             <a:r>
+              <a:rPr sz="1800" b="1" i="0">
+                <a:solidFill>
+                  <a:srgbClr val="EE6A2C"/>
+                </a:solidFill>
+                <a:latin typeface="Arial"/>
+              </a:rPr>
+              <a:t>prises connectées</a:t>
+            </a:r>
+            <a:r>
               <a:rPr sz="1600" b="1" i="0">
                 <a:solidFill>
-                  <a:srgbClr val="555B66"/>
-                </a:solidFill>
-                <a:latin typeface="Arial"/>
-              </a:rPr>
-              <a:t>À compléter</a:t>
+                  <a:srgbClr val="111111"/>
+                </a:solidFill>
+                <a:latin typeface="Arial"/>
+              </a:rPr>
+              <a:t>   canalisations</a:t>
             </a:r>
           </a:p>
           <a:p>
@@ -5299,13 +5308,22 @@
               </a:spcAft>
             </a:pPr>
             <a:r>
-              <a:rPr sz="1100" b="0" i="0">
+              <a:rPr sz="1500" b="1" i="0">
                 <a:solidFill>
                   <a:srgbClr val="555B66"/>
                 </a:solidFill>
                 <a:latin typeface="Arial"/>
               </a:rPr>
-              <a:t>Rapport d'insights de septembre</a:t>
+              <a:t>outils</a:t>
+            </a:r>
+            <a:r>
+              <a:rPr sz="1400" b="1" i="0">
+                <a:solidFill>
+                  <a:srgbClr val="111111"/>
+                </a:solidFill>
+                <a:latin typeface="Arial"/>
+              </a:rPr>
+              <a:t>   tuyaux PVC</a:t>
             </a:r>
           </a:p>
           <a:p>
@@ -5315,13 +5333,106 @@
               </a:spcAft>
             </a:pPr>
             <a:r>
+              <a:rPr sz="1300" b="1" i="0">
+                <a:solidFill>
+                  <a:srgbClr val="EE6A2C"/>
+                </a:solidFill>
+                <a:latin typeface="Arial"/>
+              </a:rPr>
+              <a:t>gel</a:t>
+            </a:r>
+            <a:r>
+              <a:rPr sz="1200" b="0" i="0">
+                <a:solidFill>
+                  <a:srgbClr val="555B66"/>
+                </a:solidFill>
+                <a:latin typeface="Arial"/>
+              </a:rPr>
+              <a:t>   humidimètre</a:t>
+            </a:r>
+          </a:p>
+          <a:p>
+            <a:pPr algn="l">
+              <a:spcAft>
+                <a:spcPts val="500"/>
+              </a:spcAft>
+            </a:pPr>
+            <a:r>
+              <a:rPr sz="1100" b="1" i="0">
+                <a:solidFill>
+                  <a:srgbClr val="EE6A2C"/>
+                </a:solidFill>
+                <a:latin typeface="Arial"/>
+              </a:rPr>
+              <a:t>Legrand</a:t>
+            </a:r>
+            <a:r>
+              <a:rPr sz="1100" b="1" i="0">
+                <a:solidFill>
+                  <a:srgbClr val="111111"/>
+                </a:solidFill>
+                <a:latin typeface="Arial"/>
+              </a:rPr>
+              <a:t>   Bosch</a:t>
+            </a:r>
+            <a:r>
               <a:rPr sz="1100" b="0" i="0">
                 <a:solidFill>
                   <a:srgbClr val="555B66"/>
                 </a:solidFill>
                 <a:latin typeface="Arial"/>
               </a:rPr>
-              <a:t>non disponible pour Mabex</a:t>
+              <a:t>   Makita</a:t>
+            </a:r>
+          </a:p>
+          <a:p>
+            <a:pPr algn="l">
+              <a:spcAft>
+                <a:spcPts val="500"/>
+              </a:spcAft>
+            </a:pPr>
+            <a:r>
+              <a:rPr sz="1100" b="1" i="0">
+                <a:solidFill>
+                  <a:srgbClr val="111111"/>
+                </a:solidFill>
+                <a:latin typeface="Arial"/>
+              </a:rPr>
+              <a:t>chantier</a:t>
+            </a:r>
+            <a:r>
+              <a:rPr sz="1100" b="0" i="0">
+                <a:solidFill>
+                  <a:srgbClr val="555B66"/>
+                </a:solidFill>
+                <a:latin typeface="Arial"/>
+              </a:rPr>
+              <a:t>   peinture</a:t>
+            </a:r>
+          </a:p>
+          <a:p>
+            <a:pPr algn="l">
+              <a:spcAft>
+                <a:spcPts val="500"/>
+              </a:spcAft>
+            </a:pPr>
+            <a:r>
+              <a:rPr sz="1100" b="1" i="0">
+                <a:solidFill>
+                  <a:srgbClr val="111111"/>
+                </a:solidFill>
+                <a:latin typeface="Arial"/>
+              </a:rPr>
+              <a:t>Leroy Merlin</a:t>
+            </a:r>
+            <a:r>
+              <a:rPr sz="1100" b="0" i="0">
+                <a:solidFill>
+                  <a:srgbClr val="555B66"/>
+                </a:solidFill>
+                <a:latin typeface="Arial"/>
+              </a:rPr>
+              <a:t>   Chausson</a:t>
             </a:r>
           </a:p>
         </p:txBody>
@@ -5505,7 +5616,7 @@
                 </a:solidFill>
                 <a:latin typeface="Arial"/>
               </a:rPr>
-              <a:t>À compléter</a:t>
+              <a:t>Montre-moi des prises connectées compatibles avec ma box</a:t>
             </a:r>
           </a:p>
         </p:txBody>
@@ -5619,7 +5730,7 @@
                 </a:solidFill>
                 <a:latin typeface="Arial"/>
               </a:rPr>
-              <a:t>À compléter</a:t>
+              <a:t>Quelle puissance de prise renforcée recommandes-tu pour un usage quotidien ?</a:t>
             </a:r>
           </a:p>
         </p:txBody>
@@ -5733,7 +5844,7 @@
                 </a:solidFill>
                 <a:latin typeface="Arial"/>
               </a:rPr>
-              <a:t>À compléter</a:t>
+              <a:t>Comment protéger les canalisations et la pompe contre le gel ?</a:t>
             </a:r>
           </a:p>
         </p:txBody>
@@ -5847,7 +5958,7 @@
                 </a:solidFill>
                 <a:latin typeface="Arial"/>
               </a:rPr>
-              <a:t>À compléter</a:t>
+              <a:t>Quels risques pour les tuyaux PVC à long terme ?</a:t>
             </a:r>
           </a:p>
         </p:txBody>
@@ -5961,7 +6072,7 @@
                 </a:solidFill>
                 <a:latin typeface="Arial"/>
               </a:rPr>
-              <a:t>À compléter</a:t>
+              <a:t>Tu peux me recommander un bon humidimètre pour bois ?</a:t>
             </a:r>
           </a:p>
         </p:txBody>
@@ -6145,7 +6256,7 @@
                 </a:solidFill>
                 <a:latin typeface="Arial"/>
               </a:rPr>
-              <a:t>Électricité, interrupteurs et prises</a:t>
+              <a:t>Électricité, interrupteurs et prises · 4 %</a:t>
             </a:r>
           </a:p>
         </p:txBody>
@@ -6224,7 +6335,7 @@
                 </a:solidFill>
                 <a:latin typeface="Arial"/>
               </a:rPr>
-              <a:t>Chauffe-eau et eau chaude · 20 %</a:t>
+              <a:t>Chauffe-eau et eau chaude · 11 %</a:t>
             </a:r>
           </a:p>
         </p:txBody>
@@ -6303,7 +6414,7 @@
                 </a:solidFill>
                 <a:latin typeface="Arial"/>
               </a:rPr>
-              <a:t>Chauffage et radiateurs · 16 %</a:t>
+              <a:t>Chauffage et radiateurs · 3 %</a:t>
             </a:r>
           </a:p>
         </p:txBody>
@@ -6382,7 +6493,7 @@
                 </a:solidFill>
                 <a:latin typeface="Arial"/>
               </a:rPr>
-              <a:t>EPI et vêtements de sécurité · 3 %</a:t>
+              <a:t>EPI et vêtements de sécurité · 13 %</a:t>
             </a:r>
           </a:p>
         </p:txBody>
@@ -6461,7 +6572,7 @@
                 </a:solidFill>
                 <a:latin typeface="Arial"/>
               </a:rPr>
-              <a:t>Outillage et plomberie · &lt; 1 %</a:t>
+              <a:t>Outillage et plomberie · 69 %</a:t>
             </a:r>
           </a:p>
         </p:txBody>
@@ -6475,7 +6586,7 @@
         <p:spPr>
           <a:xfrm>
             <a:off x="10564368" y="4450080"/>
-            <a:ext cx="475488" cy="818083"/>
+            <a:ext cx="475488" cy="53644"/>
           </a:xfrm>
           <a:prstGeom prst="rect">
             <a:avLst/>
@@ -6512,49 +6623,14 @@
       </p:sp>
       <p:sp>
         <p:nvSpPr>
-          <p:cNvPr id="91" name="TextBox 90"/>
-          <p:cNvSpPr txBox="1"/>
-          <p:nvPr/>
-        </p:nvSpPr>
-        <p:spPr>
-          <a:xfrm>
-            <a:off x="10564368" y="4450080"/>
-            <a:ext cx="475488" cy="818083"/>
-          </a:xfrm>
-          <a:prstGeom prst="rect">
-            <a:avLst/>
-          </a:prstGeom>
-          <a:noFill/>
-        </p:spPr>
-        <p:txBody>
-          <a:bodyPr wrap="square" anchor="ctr" lIns="0" rIns="0" tIns="0" bIns="0">
-            <a:spAutoFit/>
-          </a:bodyPr>
-          <a:lstStyle/>
-          <a:p>
-            <a:pPr algn="ctr"/>
-            <a:r>
-              <a:rPr sz="1000" b="1" i="0">
-                <a:solidFill>
-                  <a:srgbClr val="FFFFFF"/>
-                </a:solidFill>
-                <a:latin typeface="Arial"/>
-              </a:rPr>
-              <a:t>61 %</a:t>
-            </a:r>
-          </a:p>
-        </p:txBody>
-      </p:sp>
-      <p:sp>
-        <p:nvSpPr>
-          <p:cNvPr id="92" name="Rectangle 91"/>
+          <p:cNvPr id="91" name="Rectangle 90"/>
           <p:cNvSpPr/>
           <p:nvPr/>
         </p:nvSpPr>
         <p:spPr>
           <a:xfrm>
-            <a:off x="10564368" y="5268163"/>
-            <a:ext cx="475488" cy="268224"/>
+            <a:off x="10564368" y="4503724"/>
+            <a:ext cx="475488" cy="147523"/>
           </a:xfrm>
           <a:prstGeom prst="rect">
             <a:avLst/>
@@ -6591,14 +6667,14 @@
       </p:sp>
       <p:sp>
         <p:nvSpPr>
-          <p:cNvPr id="93" name="Rectangle 92"/>
+          <p:cNvPr id="92" name="Rectangle 91"/>
           <p:cNvSpPr/>
           <p:nvPr/>
         </p:nvSpPr>
         <p:spPr>
           <a:xfrm>
-            <a:off x="10564368" y="5536387"/>
-            <a:ext cx="475488" cy="214579"/>
+            <a:off x="10564368" y="4651248"/>
+            <a:ext cx="475488" cy="40233"/>
           </a:xfrm>
           <a:prstGeom prst="rect">
             <a:avLst/>
@@ -6635,14 +6711,14 @@
       </p:sp>
       <p:sp>
         <p:nvSpPr>
-          <p:cNvPr id="94" name="Rectangle 93"/>
+          <p:cNvPr id="93" name="Rectangle 92"/>
           <p:cNvSpPr/>
           <p:nvPr/>
         </p:nvSpPr>
         <p:spPr>
           <a:xfrm>
-            <a:off x="10564368" y="5750966"/>
-            <a:ext cx="475488" cy="40233"/>
+            <a:off x="10564368" y="4691481"/>
+            <a:ext cx="475488" cy="174345"/>
           </a:xfrm>
           <a:prstGeom prst="rect">
             <a:avLst/>
@@ -6679,14 +6755,14 @@
       </p:sp>
       <p:sp>
         <p:nvSpPr>
-          <p:cNvPr id="95" name="Rectangle 94"/>
+          <p:cNvPr id="94" name="Rectangle 93"/>
           <p:cNvSpPr/>
           <p:nvPr/>
         </p:nvSpPr>
         <p:spPr>
           <a:xfrm>
-            <a:off x="10564368" y="5791200"/>
-            <a:ext cx="475488" cy="0"/>
+            <a:off x="10564368" y="4865827"/>
+            <a:ext cx="475488" cy="925372"/>
           </a:xfrm>
           <a:prstGeom prst="rect">
             <a:avLst/>
@@ -6718,6 +6794,41 @@
           <a:lstStyle/>
           <a:p>
             <a:pPr algn="ctr"/>
+          </a:p>
+        </p:txBody>
+      </p:sp>
+      <p:sp>
+        <p:nvSpPr>
+          <p:cNvPr id="95" name="TextBox 94"/>
+          <p:cNvSpPr txBox="1"/>
+          <p:nvPr/>
+        </p:nvSpPr>
+        <p:spPr>
+          <a:xfrm>
+            <a:off x="10564368" y="4865827"/>
+            <a:ext cx="475488" cy="925372"/>
+          </a:xfrm>
+          <a:prstGeom prst="rect">
+            <a:avLst/>
+          </a:prstGeom>
+          <a:noFill/>
+        </p:spPr>
+        <p:txBody>
+          <a:bodyPr wrap="square" anchor="ctr" lIns="0" rIns="0" tIns="0" bIns="0">
+            <a:spAutoFit/>
+          </a:bodyPr>
+          <a:lstStyle/>
+          <a:p>
+            <a:pPr algn="ctr"/>
+            <a:r>
+              <a:rPr sz="1000" b="1" i="0">
+                <a:solidFill>
+                  <a:srgbClr val="FFFFFF"/>
+                </a:solidFill>
+                <a:latin typeface="Arial"/>
+              </a:rPr>
+              <a:t>69 %</a:t>
+            </a:r>
           </a:p>
         </p:txBody>
       </p:sp>
@@ -7122,7 +7233,7 @@
                 </a:solidFill>
                 <a:latin typeface="Arial"/>
               </a:rPr>
-              <a:t>Diffusion multipliée par 3,6</a:t>
+              <a:t>La plomberie clique le plus</a:t>
             </a:r>
           </a:p>
         </p:txBody>
@@ -7157,7 +7268,7 @@
                 </a:solidFill>
                 <a:latin typeface="Arial"/>
               </a:rPr>
-              <a:t>Les impressions passent de 87 399 à 313 395 (+259 %) et les clics de 348 à 1 668 (+379 %). Le CTR progresse de 0,40 % à 0,53 %.</a:t>
+              <a:t>Le groupe plomberie atteint 1,43 fois le CTR moyen. L'annonce sur les colliers monobloc Nicoll atteint 2,35 fois.</a:t>
             </a:r>
           </a:p>
         </p:txBody>
@@ -7192,7 +7303,7 @@
                 </a:solidFill>
                 <a:latin typeface="Arial"/>
               </a:rPr>
-              <a:t>→  À compléter avec le rapport d'insights de septembre.</a:t>
+              <a:t>→  Donner plus de place à la plomberie et au chauffe-eau dans la diffusion.</a:t>
             </a:r>
           </a:p>
         </p:txBody>
@@ -7308,7 +7419,7 @@
                 </a:solidFill>
                 <a:latin typeface="Arial"/>
               </a:rPr>
-              <a:t>Mesurer les ventes pour piloter le ROAS</a:t>
+              <a:t>Les packs d'outils séduisent les pros</a:t>
             </a:r>
           </a:p>
         </p:txBody>
@@ -7343,7 +7454,7 @@
                 </a:solidFill>
                 <a:latin typeface="Arial"/>
               </a:rPr>
-              <a:t>Aucune conversion n'est remontée en septembre : le ROAS cible (≥ 10) ne peut pas encore être mesuré.</a:t>
+              <a:t>Les packs d'outils électroportatifs (Milwaukee, Makita, Dewalt…) atteignent 1,87 fois la moyenne, avec la livraison offerte dès 120 € HT.</a:t>
             </a:r>
           </a:p>
         </p:txBody>
@@ -7378,7 +7489,7 @@
                 </a:solidFill>
                 <a:latin typeface="Arial"/>
               </a:rPr>
-              <a:t>→  Vérifier le tracking des ventes avec Mabex.</a:t>
+              <a:t>→  Mettre en avant les packs chantier et la livraison offerte.</a:t>
             </a:r>
           </a:p>
         </p:txBody>
@@ -7494,7 +7605,7 @@
                 </a:solidFill>
                 <a:latin typeface="Arial"/>
               </a:rPr>
-              <a:t>À compléter</a:t>
+              <a:t>Les interrupteurs restent un point fort</a:t>
             </a:r>
           </a:p>
         </p:txBody>
@@ -7529,7 +7640,7 @@
                 </a:solidFill>
                 <a:latin typeface="Arial"/>
               </a:rPr>
-              <a:t>Rapport d'insights de septembre non disponible pour Mabex.</a:t>
+              <a:t>Les commandes d'éclairage Schneider Odace atteignent 1,36 fois la moyenne.</a:t>
             </a:r>
           </a:p>
         </p:txBody>
@@ -7564,7 +7675,7 @@
                 </a:solidFill>
                 <a:latin typeface="Arial"/>
               </a:rPr>
-              <a:t>→  À compléter.</a:t>
+              <a:t>→  Conserver l'électricité comme univers clé de la campagne.</a:t>
             </a:r>
           </a:p>
         </p:txBody>
@@ -7680,7 +7791,7 @@
                 </a:solidFill>
                 <a:latin typeface="Arial"/>
               </a:rPr>
-              <a:t>À compléter</a:t>
+              <a:t>Revoir les fiches produit génériques</a:t>
             </a:r>
           </a:p>
         </p:txBody>
@@ -7715,7 +7826,7 @@
                 </a:solidFill>
                 <a:latin typeface="Arial"/>
               </a:rPr>
-              <a:t>Rapport d'insights de septembre non disponible pour Mabex.</a:t>
+              <a:t>Les annonces au format « Référence + Tout l'équipement pro au meilleur prix » restent sous la moyenne (veste haute visibilité 0,52 fois, radiateur 0,58 fois).</a:t>
             </a:r>
           </a:p>
         </p:txBody>
@@ -7750,7 +7861,7 @@
                 </a:solidFill>
                 <a:latin typeface="Arial"/>
               </a:rPr>
-              <a:t>→  À compléter.</a:t>
+              <a:t>→  Décrire le bénéfice pour le chantier plutôt que la seule référence.</a:t>
             </a:r>
           </a:p>
         </p:txBody>
